--- a/docs/光需要时间-两页动画演示.pptx
+++ b/docs/光需要时间-两页动画演示.pptx
@@ -2238,8 +2238,8 @@
         </p:nvSpPr>
         <p:spPr>
           <a:xfrm rot="2700000">
-            <a:off x="11475720" y="3694176"/>
-            <a:ext cx="237744" cy="237744"/>
+            <a:off x="11503152" y="3721608"/>
+            <a:ext cx="182880" cy="182880"/>
           </a:xfrm>
           <a:prstGeom prst="rect">
             <a:avLst/>
@@ -2258,7 +2258,7 @@
         </p:nvSpPr>
         <p:spPr>
           <a:xfrm rot="-240000">
-            <a:off x="5349240" y="4800600"/>
+            <a:off x="5486400" y="4800600"/>
             <a:ext cx="6245352" cy="960120"/>
           </a:xfrm>
           <a:prstGeom prst="rect">
@@ -2277,7 +2277,7 @@
               <a:buNone/>
             </a:pPr>
             <a:r>
-              <a:rPr lang="en-US" sz="3000" b="1" dirty="0">
+              <a:rPr lang="en-US" sz="4000" b="1" dirty="0">
                 <a:solidFill>
                   <a:srgbClr val="F0EDE6"/>
                 </a:solidFill>
@@ -2287,7 +2287,7 @@
               </a:rPr>
               <a:t>望远镜就是时间机器</a:t>
             </a:r>
-            <a:endParaRPr lang="en-US" sz="3000" dirty="0"/>
+            <a:endParaRPr lang="en-US" sz="4000" dirty="0"/>
           </a:p>
         </p:txBody>
       </p:sp>

--- a/docs/光需要时间-两页动画演示.pptx
+++ b/docs/光需要时间-两页动画演示.pptx
@@ -1283,7 +1283,7 @@
                             </p:stCondLst>
                             <p:childTnLst>
                               <p:par>
-                                <p:cTn id="6" presetID="2" presetClass="entr" presetSubtype="8" fill="hold" nodeType="afterEffect">
+                                <p:cTn id="6" presetID="2" presetClass="entr" presetSubtype="8" accel="50000" decel="50000" fill="hold" nodeType="afterEffect">
                                   <p:stCondLst>
                                     <p:cond delay="0"/>
                                   </p:stCondLst>
@@ -1356,7 +1356,7 @@
                                 </p:cTn>
                               </p:par>
                               <p:par>
-                                <p:cTn id="10" presetID="42" presetClass="entr" presetSubtype="0" fill="hold" nodeType="afterEffect">
+                                <p:cTn id="10" presetID="42" presetClass="entr" presetSubtype="0" accel="50000" decel="50000" fill="hold" nodeType="afterEffect">
                                   <p:stCondLst>
                                     <p:cond delay="500"/>
                                   </p:stCondLst>
@@ -1432,7 +1432,7 @@
                             </p:stCondLst>
                             <p:childTnLst>
                               <p:par>
-                                <p:cTn id="16" presetID="2" presetClass="entr" presetSubtype="8" fill="hold" nodeType="clickEffect">
+                                <p:cTn id="16" presetID="2" presetClass="entr" presetSubtype="8" accel="50000" decel="50000" fill="hold" nodeType="clickEffect">
                                   <p:stCondLst>
                                     <p:cond delay="0"/>
                                   </p:stCondLst>
@@ -1523,7 +1523,7 @@
                             </p:stCondLst>
                             <p:childTnLst>
                               <p:par>
-                                <p:cTn id="23" presetID="53" presetClass="entr" presetSubtype="16" fill="hold" nodeType="clickEffect">
+                                <p:cTn id="23" presetID="53" presetClass="entr" presetSubtype="16" accel="50000" decel="50000" fill="hold" nodeType="clickEffect">
                                   <p:stCondLst>
                                     <p:cond delay="0"/>
                                   </p:stCondLst>
@@ -1604,7 +1604,7 @@
                                 </p:cTn>
                               </p:par>
                               <p:par>
-                                <p:cTn id="26" presetID="10" presetClass="entr" presetSubtype="0" fill="hold" nodeType="withEffect">
+                                <p:cTn id="26" presetID="10" presetClass="entr" presetSubtype="0" accel="50000" decel="50000" fill="hold" nodeType="withEffect">
                                   <p:stCondLst>
                                     <p:cond delay="0"/>
                                   </p:stCondLst>
@@ -1639,7 +1639,7 @@
                                 </p:cTn>
                               </p:par>
                               <p:par>
-                                <p:cTn id="29" presetID="22" presetClass="entr" presetSubtype="8" fill="hold" nodeType="withEffect">
+                                <p:cTn id="29" presetID="22" presetClass="entr" presetSubtype="8" accel="50000" decel="50000" fill="hold" nodeType="withEffect">
                                   <p:stCondLst>
                                     <p:cond delay="0"/>
                                   </p:stCondLst>
@@ -1674,7 +1674,7 @@
                                 </p:cTn>
                               </p:par>
                               <p:par>
-                                <p:cTn id="32" presetID="10" presetClass="entr" presetSubtype="0" fill="hold" nodeType="withEffect">
+                                <p:cTn id="32" presetID="10" presetClass="entr" presetSubtype="0" accel="50000" decel="50000" fill="hold" nodeType="withEffect">
                                   <p:stCondLst>
                                     <p:cond delay="0"/>
                                   </p:stCondLst>
@@ -2367,11 +2367,31 @@
                 <a:ea typeface="微软雅黑" pitchFamily="34" charset="-122"/>
                 <a:cs typeface="微软雅黑" pitchFamily="34" charset="-120"/>
               </a:rPr>
-              <a:t>比邻星 4.2465 光年 · 银心距离为估算</a:t>
+              <a:t>比邻星 4.2465 光年 · 银心为估算 · 横轴非等比</a:t>
             </a:r>
             <a:endParaRPr lang="en-US" sz="1500" dirty="0"/>
           </a:p>
         </p:txBody>
+      </p:sp>
+      <p:sp>
+        <p:nvSpPr>
+          <p:cNvPr id="17" name="光子"/>
+          <p:cNvSpPr/>
+          <p:nvPr/>
+        </p:nvSpPr>
+        <p:spPr>
+          <a:xfrm>
+            <a:off x="566928" y="3675888"/>
+            <a:ext cx="274320" cy="274320"/>
+          </a:xfrm>
+          <a:prstGeom prst="ellipse">
+            <a:avLst/>
+          </a:prstGeom>
+          <a:solidFill>
+            <a:srgbClr val="C33A2B"/>
+          </a:solidFill>
+          <a:ln/>
+        </p:spPr>
       </p:sp>
     </p:spTree>
   </p:cSld>
@@ -2399,26 +2419,99 @@
               <p:cTn id="2" dur="indefinite" nodeType="mainSeq">
                 <p:childTnLst>
                   <p:par>
-                    <p:cTn id="19" fill="hold">
+                    <p:cTn id="35" fill="hold">
                       <p:stCondLst>
                         <p:cond delay="0"/>
                       </p:stCondLst>
                       <p:childTnLst>
                         <p:par>
-                          <p:cTn id="20" fill="hold">
+                          <p:cTn id="36" fill="hold">
                             <p:stCondLst>
                               <p:cond delay="0"/>
                             </p:stCondLst>
                             <p:childTnLst>
                               <p:par>
-                                <p:cTn id="6" presetID="42" presetClass="entr" presetSubtype="0" fill="hold" nodeType="afterEffect">
+                                <p:cTn id="7" presetID="2" presetClass="entr" presetSubtype="8" fill="hold" nodeType="afterEffect">
                                   <p:stCondLst>
                                     <p:cond delay="0"/>
                                   </p:stCondLst>
                                   <p:childTnLst>
                                     <p:set>
                                       <p:cBhvr>
-                                        <p:cTn id="3" dur="500" fill="hold">
+                                        <p:cTn id="4" dur="500" fill="hold">
+                                          <p:stCondLst>
+                                            <p:cond delay="0"/>
+                                          </p:stCondLst>
+                                        </p:cTn>
+                                        <p:tgtEl>
+                                          <p:spTgt spid="17"/>
+                                        </p:tgtEl>
+                                        <p:attrNameLst>
+                                          <p:attrName>style.visibility</p:attrName>
+                                        </p:attrNameLst>
+                                      </p:cBhvr>
+                                      <p:to>
+                                        <p:strVal val="visible"/>
+                                      </p:to>
+                                    </p:set>
+                                    <p:anim calcmode="lin" valueType="num">
+                                      <p:cBhvr additive="base">
+                                        <p:cTn id="5" dur="3000" fill="hold"/>
+                                        <p:tgtEl>
+                                          <p:spTgt spid="17"/>
+                                        </p:tgtEl>
+                                        <p:attrNameLst>
+                                          <p:attrName>ppt_x</p:attrName>
+                                        </p:attrNameLst>
+                                      </p:cBhvr>
+                                      <p:tavLst>
+                                        <p:tav tm="0">
+                                          <p:val>
+                                            <p:strVal val="#ppt_x"/>
+                                          </p:val>
+                                        </p:tav>
+                                        <p:tav tm="100000">
+                                          <p:val>
+                                            <p:strVal val="#ppt_x+0.8687"/>
+                                          </p:val>
+                                        </p:tav>
+                                      </p:tavLst>
+                                    </p:anim>
+                                    <p:anim calcmode="lin" valueType="num">
+                                      <p:cBhvr additive="base">
+                                        <p:cTn id="6" dur="3000" fill="hold"/>
+                                        <p:tgtEl>
+                                          <p:spTgt spid="17"/>
+                                        </p:tgtEl>
+                                        <p:attrNameLst>
+                                          <p:attrName>ppt_y</p:attrName>
+                                        </p:attrNameLst>
+                                      </p:cBhvr>
+                                      <p:tavLst>
+                                        <p:tav tm="0">
+                                          <p:val>
+                                            <p:strVal val="#ppt_y"/>
+                                          </p:val>
+                                        </p:tav>
+                                        <p:tav tm="100000">
+                                          <p:val>
+                                            <p:strVal val="#ppt_y"/>
+                                          </p:val>
+                                        </p:tav>
+                                      </p:tavLst>
+                                    </p:anim>
+                                  </p:childTnLst>
+                                </p:cTn>
+                              </p:par>
+                              <p:par>
+                                <p:cTn id="12" presetID="42" presetClass="entr" presetSubtype="0" fill="hold" nodeType="withEffect">
+                                  <p:stCondLst>
+                                    <p:cond delay="383"/>
+                                  </p:stCondLst>
+                                  <p:childTnLst>
+                                    <p:set>
+                                      <p:cBhvr>
+                                        <p:cTn id="9" dur="500" fill="hold">
                                           <p:stCondLst>
                                             <p:cond delay="0"/>
                                           </p:stCondLst>
@@ -2436,7 +2529,7 @@
                                     </p:set>
                                     <p:animEffect transition="in" filter="fade">
                                       <p:cBhvr>
-                                        <p:cTn id="4" dur="550"/>
+                                        <p:cTn id="10" dur="550"/>
                                         <p:tgtEl>
                                           <p:spTgt spid="6"/>
                                         </p:tgtEl>
@@ -2444,7 +2537,7 @@
                                     </p:animEffect>
                                     <p:anim calcmode="lin" valueType="num">
                                       <p:cBhvr additive="base">
-                                        <p:cTn id="5" dur="550" fill="hold"/>
+                                        <p:cTn id="11" dur="550" fill="hold"/>
                                         <p:tgtEl>
                                           <p:spTgt spid="6"/>
                                         </p:tgtEl>
@@ -2469,14 +2562,14 @@
                                 </p:cTn>
                               </p:par>
                               <p:par>
-                                <p:cTn id="10" presetID="42" presetClass="entr" presetSubtype="0" fill="hold" nodeType="afterEffect">
+                                <p:cTn id="17" presetID="42" presetClass="entr" presetSubtype="0" fill="hold" nodeType="withEffect">
                                   <p:stCondLst>
-                                    <p:cond delay="550"/>
+                                    <p:cond delay="1122"/>
                                   </p:stCondLst>
                                   <p:childTnLst>
                                     <p:set>
                                       <p:cBhvr>
-                                        <p:cTn id="7" dur="500" fill="hold">
+                                        <p:cTn id="14" dur="500" fill="hold">
                                           <p:stCondLst>
                                             <p:cond delay="0"/>
                                           </p:stCondLst>
@@ -2494,7 +2587,7 @@
                                     </p:set>
                                     <p:animEffect transition="in" filter="fade">
                                       <p:cBhvr>
-                                        <p:cTn id="8" dur="550"/>
+                                        <p:cTn id="15" dur="550"/>
                                         <p:tgtEl>
                                           <p:spTgt spid="8"/>
                                         </p:tgtEl>
@@ -2502,7 +2595,7 @@
                                     </p:animEffect>
                                     <p:anim calcmode="lin" valueType="num">
                                       <p:cBhvr additive="base">
-                                        <p:cTn id="9" dur="550" fill="hold"/>
+                                        <p:cTn id="16" dur="550" fill="hold"/>
                                         <p:tgtEl>
                                           <p:spTgt spid="8"/>
                                         </p:tgtEl>
@@ -2527,14 +2620,14 @@
                                 </p:cTn>
                               </p:par>
                               <p:par>
-                                <p:cTn id="14" presetID="42" presetClass="entr" presetSubtype="0" fill="hold" nodeType="afterEffect">
+                                <p:cTn id="22" presetID="42" presetClass="entr" presetSubtype="0" fill="hold" nodeType="withEffect">
                                   <p:stCondLst>
-                                    <p:cond delay="1100"/>
+                                    <p:cond delay="1860"/>
                                   </p:stCondLst>
                                   <p:childTnLst>
                                     <p:set>
                                       <p:cBhvr>
-                                        <p:cTn id="11" dur="500" fill="hold">
+                                        <p:cTn id="19" dur="500" fill="hold">
                                           <p:stCondLst>
                                             <p:cond delay="0"/>
                                           </p:stCondLst>
@@ -2552,7 +2645,7 @@
                                     </p:set>
                                     <p:animEffect transition="in" filter="fade">
                                       <p:cBhvr>
-                                        <p:cTn id="12" dur="550"/>
+                                        <p:cTn id="20" dur="550"/>
                                         <p:tgtEl>
                                           <p:spTgt spid="10"/>
                                         </p:tgtEl>
@@ -2560,7 +2653,7 @@
                                     </p:animEffect>
                                     <p:anim calcmode="lin" valueType="num">
                                       <p:cBhvr additive="base">
-                                        <p:cTn id="13" dur="550" fill="hold"/>
+                                        <p:cTn id="21" dur="550" fill="hold"/>
                                         <p:tgtEl>
                                           <p:spTgt spid="10"/>
                                         </p:tgtEl>
@@ -2585,14 +2678,14 @@
                                 </p:cTn>
                               </p:par>
                               <p:par>
-                                <p:cTn id="18" presetID="42" presetClass="entr" presetSubtype="0" fill="hold" nodeType="afterEffect">
+                                <p:cTn id="27" presetID="42" presetClass="entr" presetSubtype="0" fill="hold" nodeType="withEffect">
                                   <p:stCondLst>
-                                    <p:cond delay="1650"/>
+                                    <p:cond delay="2598"/>
                                   </p:stCondLst>
                                   <p:childTnLst>
                                     <p:set>
                                       <p:cBhvr>
-                                        <p:cTn id="15" dur="500" fill="hold">
+                                        <p:cTn id="24" dur="500" fill="hold">
                                           <p:stCondLst>
                                             <p:cond delay="0"/>
                                           </p:stCondLst>
@@ -2610,7 +2703,7 @@
                                     </p:set>
                                     <p:animEffect transition="in" filter="fade">
                                       <p:cBhvr>
-                                        <p:cTn id="16" dur="550"/>
+                                        <p:cTn id="25" dur="550"/>
                                         <p:tgtEl>
                                           <p:spTgt spid="12"/>
                                         </p:tgtEl>
@@ -2618,7 +2711,7 @@
                                     </p:animEffect>
                                     <p:anim calcmode="lin" valueType="num">
                                       <p:cBhvr additive="base">
-                                        <p:cTn id="17" dur="550" fill="hold"/>
+                                        <p:cTn id="26" dur="550" fill="hold"/>
                                         <p:tgtEl>
                                           <p:spTgt spid="12"/>
                                         </p:tgtEl>
@@ -2642,38 +2735,40 @@
                                   </p:childTnLst>
                                 </p:cTn>
                               </p:par>
-                            </p:childTnLst>
-                          </p:cTn>
-                        </p:par>
-                      </p:childTnLst>
-                    </p:cTn>
-                  </p:par>
-                  <p:par>
-                    <p:cTn id="23" fill="hold">
-                      <p:stCondLst>
-                        <p:cond delay="indefinite"/>
-                      </p:stCondLst>
-                      <p:childTnLst>
-                        <p:par>
-                          <p:cTn id="24" fill="hold">
-                            <p:stCondLst>
-                              <p:cond delay="0"/>
-                            </p:stCondLst>
-                            <p:childTnLst>
                               <p:par>
-                                <p:cTn id="22" presetID="6" presetClass="emph" presetSubtype="0" fill="hold" nodeType="clickEffect">
+                                <p:cTn id="30" presetID="8" presetClass="emph" presetSubtype="0" fill="hold" nodeType="withEffect">
                                   <p:stCondLst>
-                                    <p:cond delay="0"/>
+                                    <p:cond delay="3000"/>
+                                  </p:stCondLst>
+                                  <p:childTnLst>
+                                    <p:animRot by="21600000">
+                                      <p:cBhvr>
+                                        <p:cTn id="29" dur="600" fill="hold"/>
+                                        <p:tgtEl>
+                                          <p:spTgt spid="14"/>
+                                        </p:tgtEl>
+                                        <p:attrNameLst>
+                                          <p:attrName>r</p:attrName>
+                                        </p:attrNameLst>
+                                      </p:cBhvr>
+                                    </p:animRot>
+                                  </p:childTnLst>
+                                </p:cTn>
+                              </p:par>
+                              <p:par>
+                                <p:cTn id="33" presetID="6" presetClass="emph" presetSubtype="0" repeatCount="2000" fill="hold" nodeType="withEffect">
+                                  <p:stCondLst>
+                                    <p:cond delay="3000"/>
                                   </p:stCondLst>
                                   <p:childTnLst>
                                     <p:animScale>
                                       <p:cBhvr>
-                                        <p:cTn id="21" dur="500" autoRev="1" fill="hold"/>
+                                        <p:cTn id="32" dur="500" autoRev="1" fill="hold"/>
                                         <p:tgtEl>
                                           <p:spTgt spid="15"/>
                                         </p:tgtEl>
                                       </p:cBhvr>
-                                      <p:by x="110000" y="110000"/>
+                                      <p:by x="108000" y="108000"/>
                                     </p:animScale>
                                   </p:childTnLst>
                                 </p:cTn>
